--- a/CMPSC445_Project2_Presentation.pptx
+++ b/CMPSC445_Project2_Presentation.pptx
@@ -15,8 +15,7 @@
     <p:sldId id="260" r:id="rId9"/>
     <p:sldId id="261" r:id="rId10"/>
     <p:sldId id="262" r:id="rId11"/>
-    <p:sldId id="263" r:id="rId12"/>
-    <p:sldId id="264" r:id="rId13"/>
+    <p:sldId id="264" r:id="rId12"/>
   </p:sldIdLst>
   <p:sldSz cx="12192000" cy="6858000"/>
   <p:notesSz cx="6858000" cy="9144000"/>
@@ -276,7 +275,7 @@
           <a:p>
             <a:fld id="{D1D1EADE-8E88-4C7C-8AC5-FB148DE4940E}" type="datetime1">
               <a:rPr lang="en-US" smtClean="0"/>
-              <a:t>4/26/26</a:t>
+              <a:t>4/30/26</a:t>
             </a:fld>
             <a:endParaRPr lang="en-US"/>
           </a:p>
@@ -476,7 +475,7 @@
           <a:p>
             <a:fld id="{EC3C8B9C-477D-492A-96AD-1FC2CC997A73}" type="datetime1">
               <a:rPr lang="en-US" smtClean="0"/>
-              <a:t>4/26/26</a:t>
+              <a:t>4/30/26</a:t>
             </a:fld>
             <a:endParaRPr lang="en-US"/>
           </a:p>
@@ -686,7 +685,7 @@
           <a:p>
             <a:fld id="{42D3AED5-E26D-4E29-B1B3-7847B6779594}" type="datetime1">
               <a:rPr lang="en-US" smtClean="0"/>
-              <a:t>4/26/26</a:t>
+              <a:t>4/30/26</a:t>
             </a:fld>
             <a:endParaRPr lang="en-US"/>
           </a:p>
@@ -886,7 +885,7 @@
           <a:p>
             <a:fld id="{157B6794-849E-4626-908B-D15793550EFB}" type="datetime1">
               <a:rPr lang="en-US" smtClean="0"/>
-              <a:t>4/26/26</a:t>
+              <a:t>4/30/26</a:t>
             </a:fld>
             <a:endParaRPr lang="en-US"/>
           </a:p>
@@ -1162,7 +1161,7 @@
           <a:p>
             <a:fld id="{63DB64E7-5594-42A3-ADBF-E95A7ACEAD64}" type="datetime1">
               <a:rPr lang="en-US" smtClean="0"/>
-              <a:t>4/26/26</a:t>
+              <a:t>4/30/26</a:t>
             </a:fld>
             <a:endParaRPr lang="en-US"/>
           </a:p>
@@ -1435,7 +1434,7 @@
           <a:p>
             <a:fld id="{18462B0B-D248-4FFB-8695-AD7FA4B1284A}" type="datetime1">
               <a:rPr lang="en-US" smtClean="0"/>
-              <a:t>4/26/26</a:t>
+              <a:t>4/30/26</a:t>
             </a:fld>
             <a:endParaRPr lang="en-US"/>
           </a:p>
@@ -1858,7 +1857,7 @@
           <a:p>
             <a:fld id="{D0378EFB-9159-4510-B73F-4F0409ADE937}" type="datetime1">
               <a:rPr lang="en-US" smtClean="0"/>
-              <a:t>4/26/26</a:t>
+              <a:t>4/30/26</a:t>
             </a:fld>
             <a:endParaRPr lang="en-US"/>
           </a:p>
@@ -2000,7 +1999,7 @@
           <a:p>
             <a:fld id="{89BC9412-2452-4BED-A324-9D8C115361AD}" type="datetime1">
               <a:rPr lang="en-US" smtClean="0"/>
-              <a:t>4/26/26</a:t>
+              <a:t>4/30/26</a:t>
             </a:fld>
             <a:endParaRPr lang="en-US"/>
           </a:p>
@@ -2113,7 +2112,7 @@
           <a:p>
             <a:fld id="{F5318F62-D251-40E8-A23C-F4CFE9FEAB41}" type="datetime1">
               <a:rPr lang="en-US" smtClean="0"/>
-              <a:t>4/26/26</a:t>
+              <a:t>4/30/26</a:t>
             </a:fld>
             <a:endParaRPr lang="en-US"/>
           </a:p>
@@ -2426,7 +2425,7 @@
           <a:p>
             <a:fld id="{44F76144-149E-4874-93A5-554A0357CF82}" type="datetime1">
               <a:rPr lang="en-US" smtClean="0"/>
-              <a:t>4/26/26</a:t>
+              <a:t>4/30/26</a:t>
             </a:fld>
             <a:endParaRPr lang="en-US"/>
           </a:p>
@@ -2719,7 +2718,7 @@
           <a:p>
             <a:fld id="{50BA65D8-0540-4835-AE5C-25D29DBA01BE}" type="datetime1">
               <a:rPr lang="en-US" smtClean="0"/>
-              <a:t>4/26/26</a:t>
+              <a:t>4/30/26</a:t>
             </a:fld>
             <a:endParaRPr lang="en-US"/>
           </a:p>
@@ -2961,7 +2960,7 @@
           <a:p>
             <a:fld id="{E31BA835-12AC-4E8F-955A-EA3F4DE2791F}" type="datetime1">
               <a:rPr lang="en-US" smtClean="0"/>
-              <a:t>4/26/26</a:t>
+              <a:t>4/30/26</a:t>
             </a:fld>
             <a:endParaRPr lang="en-US"/>
           </a:p>
@@ -3756,6 +3755,41 @@
           </a:prstGeom>
         </p:spPr>
       </p:pic>
+      <p:sp>
+        <p:nvSpPr>
+          <p:cNvPr id="6" name="TextBox 5">
+            <a:extLst>
+              <a:ext uri="{FF2B5EF4-FFF2-40B4-BE49-F238E27FC236}">
+                <a16:creationId xmlns:a16="http://schemas.microsoft.com/office/drawing/2014/main" id="{8D4766A4-C120-5D1F-6929-8DE5442F43E8}"/>
+              </a:ext>
+            </a:extLst>
+          </p:cNvPr>
+          <p:cNvSpPr txBox="1"/>
+          <p:nvPr/>
+        </p:nvSpPr>
+        <p:spPr>
+          <a:xfrm>
+            <a:off x="700635" y="325697"/>
+            <a:ext cx="513282" cy="369332"/>
+          </a:xfrm>
+          <a:prstGeom prst="rect">
+            <a:avLst/>
+          </a:prstGeom>
+          <a:noFill/>
+        </p:spPr>
+        <p:txBody>
+          <a:bodyPr wrap="none" rtlCol="0">
+            <a:spAutoFit/>
+          </a:bodyPr>
+          <a:lstStyle/>
+          <a:p>
+            <a:r>
+              <a:rPr lang="en-US" dirty="0"/>
+              <a:t>ZA</a:t>
+            </a:r>
+          </a:p>
+        </p:txBody>
+      </p:sp>
     </p:spTree>
     <p:extLst>
       <p:ext uri="{BB962C8B-B14F-4D97-AF65-F5344CB8AC3E}">
@@ -4016,6 +4050,41 @@
           </a:p>
         </p:txBody>
       </p:sp>
+      <p:sp>
+        <p:nvSpPr>
+          <p:cNvPr id="5" name="TextBox 4">
+            <a:extLst>
+              <a:ext uri="{FF2B5EF4-FFF2-40B4-BE49-F238E27FC236}">
+                <a16:creationId xmlns:a16="http://schemas.microsoft.com/office/drawing/2014/main" id="{47144479-C100-D24E-BCBF-63FD8E9EAB90}"/>
+              </a:ext>
+            </a:extLst>
+          </p:cNvPr>
+          <p:cNvSpPr txBox="1"/>
+          <p:nvPr/>
+        </p:nvSpPr>
+        <p:spPr>
+          <a:xfrm>
+            <a:off x="700635" y="325697"/>
+            <a:ext cx="513282" cy="369332"/>
+          </a:xfrm>
+          <a:prstGeom prst="rect">
+            <a:avLst/>
+          </a:prstGeom>
+          <a:noFill/>
+        </p:spPr>
+        <p:txBody>
+          <a:bodyPr wrap="none" rtlCol="0">
+            <a:spAutoFit/>
+          </a:bodyPr>
+          <a:lstStyle/>
+          <a:p>
+            <a:r>
+              <a:rPr lang="en-US" dirty="0"/>
+              <a:t>ZA</a:t>
+            </a:r>
+          </a:p>
+        </p:txBody>
+      </p:sp>
     </p:spTree>
     <p:extLst>
       <p:ext uri="{BB962C8B-B14F-4D97-AF65-F5344CB8AC3E}">
@@ -4051,99 +4120,6 @@
           <p:cNvPr id="2" name="Title 1">
             <a:extLst>
               <a:ext uri="{FF2B5EF4-FFF2-40B4-BE49-F238E27FC236}">
-                <a16:creationId xmlns:a16="http://schemas.microsoft.com/office/drawing/2014/main" id="{6C8C4565-6665-69E4-DC24-39D65CFE4B0E}"/>
-              </a:ext>
-            </a:extLst>
-          </p:cNvPr>
-          <p:cNvSpPr>
-            <a:spLocks noGrp="1"/>
-          </p:cNvSpPr>
-          <p:nvPr>
-            <p:ph type="title"/>
-          </p:nvPr>
-        </p:nvSpPr>
-        <p:spPr/>
-        <p:txBody>
-          <a:bodyPr/>
-          <a:lstStyle/>
-          <a:p>
-            <a:r>
-              <a:rPr lang="en-US" dirty="0" err="1"/>
-              <a:t>github</a:t>
-            </a:r>
-            <a:endParaRPr lang="en-US" dirty="0"/>
-          </a:p>
-        </p:txBody>
-      </p:sp>
-      <p:sp>
-        <p:nvSpPr>
-          <p:cNvPr id="3" name="Content Placeholder 2">
-            <a:extLst>
-              <a:ext uri="{FF2B5EF4-FFF2-40B4-BE49-F238E27FC236}">
-                <a16:creationId xmlns:a16="http://schemas.microsoft.com/office/drawing/2014/main" id="{B202AA35-E4E9-9F5F-43CF-2F06A95BCF36}"/>
-              </a:ext>
-            </a:extLst>
-          </p:cNvPr>
-          <p:cNvSpPr>
-            <a:spLocks noGrp="1"/>
-          </p:cNvSpPr>
-          <p:nvPr>
-            <p:ph idx="1"/>
-          </p:nvPr>
-        </p:nvSpPr>
-        <p:spPr/>
-        <p:txBody>
-          <a:bodyPr/>
-          <a:lstStyle/>
-          <a:p>
-            <a:r>
-              <a:rPr lang="en-US" dirty="0">
-                <a:hlinkClick r:id="rId2"/>
-              </a:rPr>
-              <a:t>https://github.com/daisyapto/CMPSC445_Project2</a:t>
-            </a:r>
-            <a:r>
-              <a:rPr lang="en-US" dirty="0"/>
-              <a:t> </a:t>
-            </a:r>
-          </a:p>
-        </p:txBody>
-      </p:sp>
-    </p:spTree>
-    <p:extLst>
-      <p:ext uri="{BB962C8B-B14F-4D97-AF65-F5344CB8AC3E}">
-        <p14:creationId xmlns:p14="http://schemas.microsoft.com/office/powerpoint/2010/main" val="2897446377"/>
-      </p:ext>
-    </p:extLst>
-  </p:cSld>
-  <p:clrMapOvr>
-    <a:masterClrMapping/>
-  </p:clrMapOvr>
-</p:sld>
-</file>
-
-<file path=ppt/slides/slide12.xml><?xml version="1.0" encoding="utf-8"?>
-<p:sld xmlns:a="http://schemas.openxmlformats.org/drawingml/2006/main" xmlns:r="http://schemas.openxmlformats.org/officeDocument/2006/relationships" xmlns:p="http://schemas.openxmlformats.org/presentationml/2006/main">
-  <p:cSld>
-    <p:spTree>
-      <p:nvGrpSpPr>
-        <p:cNvPr id="1" name=""/>
-        <p:cNvGrpSpPr/>
-        <p:nvPr/>
-      </p:nvGrpSpPr>
-      <p:grpSpPr>
-        <a:xfrm>
-          <a:off x="0" y="0"/>
-          <a:ext cx="0" cy="0"/>
-          <a:chOff x="0" y="0"/>
-          <a:chExt cx="0" cy="0"/>
-        </a:xfrm>
-      </p:grpSpPr>
-      <p:sp>
-        <p:nvSpPr>
-          <p:cNvPr id="2" name="Title 1">
-            <a:extLst>
-              <a:ext uri="{FF2B5EF4-FFF2-40B4-BE49-F238E27FC236}">
                 <a16:creationId xmlns:a16="http://schemas.microsoft.com/office/drawing/2014/main" id="{3260A013-8BC3-F0FB-DDE5-A98AC1303FB5}"/>
               </a:ext>
             </a:extLst>
@@ -4679,6 +4655,41 @@
           </a:p>
         </p:txBody>
       </p:sp>
+      <p:sp>
+        <p:nvSpPr>
+          <p:cNvPr id="5" name="TextBox 4">
+            <a:extLst>
+              <a:ext uri="{FF2B5EF4-FFF2-40B4-BE49-F238E27FC236}">
+                <a16:creationId xmlns:a16="http://schemas.microsoft.com/office/drawing/2014/main" id="{E0D2798C-C16D-BB69-0BFF-3031E8AE5EA9}"/>
+              </a:ext>
+            </a:extLst>
+          </p:cNvPr>
+          <p:cNvSpPr txBox="1"/>
+          <p:nvPr/>
+        </p:nvSpPr>
+        <p:spPr>
+          <a:xfrm>
+            <a:off x="700635" y="325697"/>
+            <a:ext cx="513282" cy="369332"/>
+          </a:xfrm>
+          <a:prstGeom prst="rect">
+            <a:avLst/>
+          </a:prstGeom>
+          <a:noFill/>
+        </p:spPr>
+        <p:txBody>
+          <a:bodyPr wrap="none" rtlCol="0">
+            <a:spAutoFit/>
+          </a:bodyPr>
+          <a:lstStyle/>
+          <a:p>
+            <a:r>
+              <a:rPr lang="en-US" dirty="0"/>
+              <a:t>ZA</a:t>
+            </a:r>
+          </a:p>
+        </p:txBody>
+      </p:sp>
     </p:spTree>
     <p:extLst>
       <p:ext uri="{BB962C8B-B14F-4D97-AF65-F5344CB8AC3E}">
@@ -4842,6 +4853,41 @@
           </a:p>
         </p:txBody>
       </p:sp>
+      <p:sp>
+        <p:nvSpPr>
+          <p:cNvPr id="5" name="TextBox 4">
+            <a:extLst>
+              <a:ext uri="{FF2B5EF4-FFF2-40B4-BE49-F238E27FC236}">
+                <a16:creationId xmlns:a16="http://schemas.microsoft.com/office/drawing/2014/main" id="{FAEE8DB8-252B-0A5A-AC15-01BB92C0B7D4}"/>
+              </a:ext>
+            </a:extLst>
+          </p:cNvPr>
+          <p:cNvSpPr txBox="1"/>
+          <p:nvPr/>
+        </p:nvSpPr>
+        <p:spPr>
+          <a:xfrm>
+            <a:off x="700635" y="325697"/>
+            <a:ext cx="513282" cy="369332"/>
+          </a:xfrm>
+          <a:prstGeom prst="rect">
+            <a:avLst/>
+          </a:prstGeom>
+          <a:noFill/>
+        </p:spPr>
+        <p:txBody>
+          <a:bodyPr wrap="none" rtlCol="0">
+            <a:spAutoFit/>
+          </a:bodyPr>
+          <a:lstStyle/>
+          <a:p>
+            <a:r>
+              <a:rPr lang="en-US" dirty="0"/>
+              <a:t>ZA</a:t>
+            </a:r>
+          </a:p>
+        </p:txBody>
+      </p:sp>
     </p:spTree>
     <p:extLst>
       <p:ext uri="{BB962C8B-B14F-4D97-AF65-F5344CB8AC3E}">
@@ -5010,6 +5056,41 @@
           </a:p>
         </p:txBody>
       </p:sp>
+      <p:sp>
+        <p:nvSpPr>
+          <p:cNvPr id="4" name="TextBox 3">
+            <a:extLst>
+              <a:ext uri="{FF2B5EF4-FFF2-40B4-BE49-F238E27FC236}">
+                <a16:creationId xmlns:a16="http://schemas.microsoft.com/office/drawing/2014/main" id="{C1541BD4-8216-F88E-2FD9-F81DCD083784}"/>
+              </a:ext>
+            </a:extLst>
+          </p:cNvPr>
+          <p:cNvSpPr txBox="1"/>
+          <p:nvPr/>
+        </p:nvSpPr>
+        <p:spPr>
+          <a:xfrm>
+            <a:off x="700635" y="325697"/>
+            <a:ext cx="533608" cy="369332"/>
+          </a:xfrm>
+          <a:prstGeom prst="rect">
+            <a:avLst/>
+          </a:prstGeom>
+          <a:noFill/>
+        </p:spPr>
+        <p:txBody>
+          <a:bodyPr wrap="none" rtlCol="0">
+            <a:spAutoFit/>
+          </a:bodyPr>
+          <a:lstStyle/>
+          <a:p>
+            <a:r>
+              <a:rPr lang="en-US" dirty="0"/>
+              <a:t>DA</a:t>
+            </a:r>
+          </a:p>
+        </p:txBody>
+      </p:sp>
     </p:spTree>
     <p:extLst>
       <p:ext uri="{BB962C8B-B14F-4D97-AF65-F5344CB8AC3E}">
@@ -5259,6 +5340,41 @@
             <a:r>
               <a:rPr lang="en-US" dirty="0"/>
               <a:t>=0.05</a:t>
+            </a:r>
+          </a:p>
+        </p:txBody>
+      </p:sp>
+      <p:sp>
+        <p:nvSpPr>
+          <p:cNvPr id="4" name="TextBox 3">
+            <a:extLst>
+              <a:ext uri="{FF2B5EF4-FFF2-40B4-BE49-F238E27FC236}">
+                <a16:creationId xmlns:a16="http://schemas.microsoft.com/office/drawing/2014/main" id="{2F7E7F53-2346-190F-3D5D-B1C63B9BB529}"/>
+              </a:ext>
+            </a:extLst>
+          </p:cNvPr>
+          <p:cNvSpPr txBox="1"/>
+          <p:nvPr/>
+        </p:nvSpPr>
+        <p:spPr>
+          <a:xfrm>
+            <a:off x="700635" y="325697"/>
+            <a:ext cx="533608" cy="369332"/>
+          </a:xfrm>
+          <a:prstGeom prst="rect">
+            <a:avLst/>
+          </a:prstGeom>
+          <a:noFill/>
+        </p:spPr>
+        <p:txBody>
+          <a:bodyPr wrap="none" rtlCol="0">
+            <a:spAutoFit/>
+          </a:bodyPr>
+          <a:lstStyle/>
+          <a:p>
+            <a:r>
+              <a:rPr lang="en-US" dirty="0"/>
+              <a:t>DA</a:t>
             </a:r>
           </a:p>
         </p:txBody>
@@ -5653,6 +5769,41 @@
           </a:prstGeom>
         </p:spPr>
       </p:pic>
+      <p:sp>
+        <p:nvSpPr>
+          <p:cNvPr id="4" name="TextBox 3">
+            <a:extLst>
+              <a:ext uri="{FF2B5EF4-FFF2-40B4-BE49-F238E27FC236}">
+                <a16:creationId xmlns:a16="http://schemas.microsoft.com/office/drawing/2014/main" id="{17B53A28-CC0D-3028-9BCB-443362F7F101}"/>
+              </a:ext>
+            </a:extLst>
+          </p:cNvPr>
+          <p:cNvSpPr txBox="1"/>
+          <p:nvPr/>
+        </p:nvSpPr>
+        <p:spPr>
+          <a:xfrm>
+            <a:off x="700635" y="325697"/>
+            <a:ext cx="533608" cy="369332"/>
+          </a:xfrm>
+          <a:prstGeom prst="rect">
+            <a:avLst/>
+          </a:prstGeom>
+          <a:noFill/>
+        </p:spPr>
+        <p:txBody>
+          <a:bodyPr wrap="none" rtlCol="0">
+            <a:spAutoFit/>
+          </a:bodyPr>
+          <a:lstStyle/>
+          <a:p>
+            <a:r>
+              <a:rPr lang="en-US" dirty="0"/>
+              <a:t>DA</a:t>
+            </a:r>
+          </a:p>
+        </p:txBody>
+      </p:sp>
     </p:spTree>
     <p:extLst>
       <p:ext uri="{BB962C8B-B14F-4D97-AF65-F5344CB8AC3E}">
@@ -5983,6 +6134,41 @@
           </a:prstGeom>
         </p:spPr>
       </p:pic>
+      <p:sp>
+        <p:nvSpPr>
+          <p:cNvPr id="4" name="TextBox 3">
+            <a:extLst>
+              <a:ext uri="{FF2B5EF4-FFF2-40B4-BE49-F238E27FC236}">
+                <a16:creationId xmlns:a16="http://schemas.microsoft.com/office/drawing/2014/main" id="{BCB05597-CA28-9C9F-76DD-F3CB67A4C809}"/>
+              </a:ext>
+            </a:extLst>
+          </p:cNvPr>
+          <p:cNvSpPr txBox="1"/>
+          <p:nvPr/>
+        </p:nvSpPr>
+        <p:spPr>
+          <a:xfrm>
+            <a:off x="700635" y="325697"/>
+            <a:ext cx="533608" cy="369332"/>
+          </a:xfrm>
+          <a:prstGeom prst="rect">
+            <a:avLst/>
+          </a:prstGeom>
+          <a:noFill/>
+        </p:spPr>
+        <p:txBody>
+          <a:bodyPr wrap="none" rtlCol="0">
+            <a:spAutoFit/>
+          </a:bodyPr>
+          <a:lstStyle/>
+          <a:p>
+            <a:r>
+              <a:rPr lang="en-US" dirty="0"/>
+              <a:t>DA</a:t>
+            </a:r>
+          </a:p>
+        </p:txBody>
+      </p:sp>
     </p:spTree>
     <p:extLst>
       <p:ext uri="{BB962C8B-B14F-4D97-AF65-F5344CB8AC3E}">
@@ -6220,18 +6406,79 @@
         <p:spPr>
           <a:xfrm>
             <a:off x="685800" y="899024"/>
-            <a:ext cx="3076032" cy="3914947"/>
+            <a:ext cx="6096000" cy="3914947"/>
           </a:xfrm>
         </p:spPr>
         <p:txBody>
           <a:bodyPr vert="horz" lIns="91440" tIns="45720" rIns="91440" bIns="45720" rtlCol="0" anchor="t">
-            <a:normAutofit/>
+            <a:normAutofit fontScale="90000"/>
           </a:bodyPr>
           <a:lstStyle/>
           <a:p>
             <a:r>
               <a:rPr lang="en-US" dirty="0"/>
               <a:t>Live demo</a:t>
+            </a:r>
+            <a:br>
+              <a:rPr lang="en-US" dirty="0"/>
+            </a:br>
+            <a:br>
+              <a:rPr lang="en-US" dirty="0"/>
+            </a:br>
+            <a:r>
+              <a:rPr lang="en-US" sz="2000" dirty="0"/>
+              <a:t>Data + Models:</a:t>
+            </a:r>
+            <a:br>
+              <a:rPr lang="en-US" sz="2000" dirty="0"/>
+            </a:br>
+            <a:r>
+              <a:rPr lang="en-US" sz="2000" dirty="0">
+                <a:hlinkClick r:id="rId2"/>
+              </a:rPr>
+              <a:t>https://github.com/daisyapto/CMPSC445_Project2</a:t>
+            </a:r>
+            <a:br>
+              <a:rPr lang="en-US" sz="2000" dirty="0"/>
+            </a:br>
+            <a:br>
+              <a:rPr lang="en-US" sz="2000" dirty="0"/>
+            </a:br>
+            <a:r>
+              <a:rPr lang="en-US" sz="2000" dirty="0"/>
+              <a:t>Deployment:</a:t>
+            </a:r>
+            <a:br>
+              <a:rPr lang="en-US" sz="2000" dirty="0"/>
+            </a:br>
+            <a:r>
+              <a:rPr lang="en-US" sz="2000" dirty="0">
+                <a:hlinkClick r:id="rId3"/>
+              </a:rPr>
+              <a:t>https://github.com/Zainabzz/COMPSC-445_FINAL</a:t>
+            </a:r>
+            <a:br>
+              <a:rPr lang="en-US" sz="2000" dirty="0"/>
+            </a:br>
+            <a:br>
+              <a:rPr lang="en-US" sz="2000" dirty="0"/>
+            </a:br>
+            <a:r>
+              <a:rPr lang="en-US" sz="2000" dirty="0"/>
+              <a:t>Website: </a:t>
+            </a:r>
+            <a:br>
+              <a:rPr lang="en-US" sz="2000" dirty="0"/>
+            </a:br>
+            <a:r>
+              <a:rPr lang="en-US" sz="2000" dirty="0">
+                <a:hlinkClick r:id="rId4"/>
+              </a:rPr>
+              <a:t>https://web-production-d9c39.up.railway.app/</a:t>
+            </a:r>
+            <a:r>
+              <a:rPr lang="en-US" sz="2000" dirty="0"/>
+              <a:t> </a:t>
             </a:r>
           </a:p>
         </p:txBody>
@@ -6303,13 +6550,13 @@
           <p:nvPr/>
         </p:nvPicPr>
         <p:blipFill>
-          <a:blip r:embed="rId2">
+          <a:blip r:embed="rId5">
             <a:extLst>
               <a:ext uri="{28A0092B-C50C-407E-A947-70E740481C1C}">
                 <a14:useLocalDpi xmlns:a14="http://schemas.microsoft.com/office/drawing/2010/main" val="0"/>
               </a:ext>
               <a:ext uri="{96DAC541-7B7A-43D3-8B79-37D633B846F1}">
-                <asvg:svgBlip xmlns:asvg="http://schemas.microsoft.com/office/drawing/2016/SVG/main" r:embed="rId3"/>
+                <asvg:svgBlip xmlns:asvg="http://schemas.microsoft.com/office/drawing/2016/SVG/main" r:embed="rId6"/>
               </a:ext>
             </a:extLst>
           </a:blip>
@@ -6319,7 +6566,7 @@
         </p:blipFill>
         <p:spPr>
           <a:xfrm>
-            <a:off x="5010149" y="723901"/>
+            <a:off x="6781800" y="899024"/>
             <a:ext cx="5410200" cy="5410200"/>
           </a:xfrm>
           <a:prstGeom prst="rect">
@@ -6327,6 +6574,41 @@
           </a:prstGeom>
         </p:spPr>
       </p:pic>
+      <p:sp>
+        <p:nvSpPr>
+          <p:cNvPr id="4" name="TextBox 3">
+            <a:extLst>
+              <a:ext uri="{FF2B5EF4-FFF2-40B4-BE49-F238E27FC236}">
+                <a16:creationId xmlns:a16="http://schemas.microsoft.com/office/drawing/2014/main" id="{CFE1536B-61B6-D555-0820-75AAAA23C972}"/>
+              </a:ext>
+            </a:extLst>
+          </p:cNvPr>
+          <p:cNvSpPr txBox="1"/>
+          <p:nvPr/>
+        </p:nvSpPr>
+        <p:spPr>
+          <a:xfrm>
+            <a:off x="700635" y="325697"/>
+            <a:ext cx="513282" cy="369332"/>
+          </a:xfrm>
+          <a:prstGeom prst="rect">
+            <a:avLst/>
+          </a:prstGeom>
+          <a:noFill/>
+        </p:spPr>
+        <p:txBody>
+          <a:bodyPr wrap="none" rtlCol="0">
+            <a:spAutoFit/>
+          </a:bodyPr>
+          <a:lstStyle/>
+          <a:p>
+            <a:r>
+              <a:rPr lang="en-US" dirty="0"/>
+              <a:t>ZA</a:t>
+            </a:r>
+          </a:p>
+        </p:txBody>
+      </p:sp>
     </p:spTree>
     <p:extLst>
       <p:ext uri="{BB962C8B-B14F-4D97-AF65-F5344CB8AC3E}">
@@ -6465,6 +6747,41 @@
             <a:r>
               <a:rPr lang="en-US" dirty="0"/>
               <a:t>High accuracy &amp; classification reports (due to smaller amount classes to classify from)</a:t>
+            </a:r>
+          </a:p>
+        </p:txBody>
+      </p:sp>
+      <p:sp>
+        <p:nvSpPr>
+          <p:cNvPr id="4" name="TextBox 3">
+            <a:extLst>
+              <a:ext uri="{FF2B5EF4-FFF2-40B4-BE49-F238E27FC236}">
+                <a16:creationId xmlns:a16="http://schemas.microsoft.com/office/drawing/2014/main" id="{BB8E1ABB-8520-9471-F1F1-BABC428E1B8A}"/>
+              </a:ext>
+            </a:extLst>
+          </p:cNvPr>
+          <p:cNvSpPr txBox="1"/>
+          <p:nvPr/>
+        </p:nvSpPr>
+        <p:spPr>
+          <a:xfrm>
+            <a:off x="700635" y="325697"/>
+            <a:ext cx="533608" cy="369332"/>
+          </a:xfrm>
+          <a:prstGeom prst="rect">
+            <a:avLst/>
+          </a:prstGeom>
+          <a:noFill/>
+        </p:spPr>
+        <p:txBody>
+          <a:bodyPr wrap="none" rtlCol="0">
+            <a:spAutoFit/>
+          </a:bodyPr>
+          <a:lstStyle/>
+          <a:p>
+            <a:r>
+              <a:rPr lang="en-US" dirty="0"/>
+              <a:t>DA</a:t>
             </a:r>
           </a:p>
         </p:txBody>
